--- a/analysis/presentations/2026-08-19-fusa-sig-status/xen-sbom-status-report.pptx
+++ b/analysis/presentations/2026-08-19-fusa-sig-status/xen-sbom-status-report.pptx
@@ -16,6 +16,7 @@
     <p:sldId id="264" r:id="rId15"/>
     <p:sldId id="265" r:id="rId16"/>
     <p:sldId id="266" r:id="rId17"/>
+    <p:sldId id="267" r:id="rId18"/>
   </p:sldIdLst>
   <p:sldSz cx="12191695" cy="6858000" type="screen4x3"/>
   <p:notesSz cx="6858000" cy="9144000"/>
@@ -3353,13 +3354,13 @@
         <p:spPr>
           <a:xfrm>
             <a:off x="0" y="0"/>
-            <a:ext cx="12191695" cy="6858000"/>
+            <a:ext cx="12191695" cy="1051560"/>
           </a:xfrm>
           <a:prstGeom prst="rect">
             <a:avLst/>
           </a:prstGeom>
           <a:solidFill>
-            <a:srgbClr val="3A3A3A"/>
+            <a:srgbClr val="1B2A4A"/>
           </a:solidFill>
           <a:ln>
             <a:noFill/>
@@ -3390,14 +3391,58 @@
       </p:sp>
       <p:sp>
         <p:nvSpPr>
-          <p:cNvPr id="3" name="TextBox 2"/>
+          <p:cNvPr id="3" name="Rectangle 2"/>
+          <p:cNvSpPr/>
+          <p:nvPr/>
+        </p:nvSpPr>
+        <p:spPr>
+          <a:xfrm>
+            <a:off x="0" y="1051560"/>
+            <a:ext cx="12191695" cy="38100"/>
+          </a:xfrm>
+          <a:prstGeom prst="rect">
+            <a:avLst/>
+          </a:prstGeom>
+          <a:solidFill>
+            <a:srgbClr val="2E86AB"/>
+          </a:solidFill>
+          <a:ln>
+            <a:noFill/>
+          </a:ln>
+          <a:effectLst/>
+        </p:spPr>
+        <p:style>
+          <a:lnRef idx="1">
+            <a:schemeClr val="accent1"/>
+          </a:lnRef>
+          <a:fillRef idx="3">
+            <a:schemeClr val="accent1"/>
+          </a:fillRef>
+          <a:effectRef idx="2">
+            <a:schemeClr val="accent1"/>
+          </a:effectRef>
+          <a:fontRef idx="minor">
+            <a:schemeClr val="lt1"/>
+          </a:fontRef>
+        </p:style>
+        <p:txBody>
+          <a:bodyPr rtlCol="0" anchor="ctr"/>
+          <a:lstStyle/>
+          <a:p>
+            <a:pPr algn="ctr"/>
+          </a:p>
+        </p:txBody>
+      </p:sp>
+      <p:sp>
+        <p:nvSpPr>
+          <p:cNvPr id="4" name="TextBox 3"/>
           <p:cNvSpPr txBox="1"/>
           <p:nvPr/>
         </p:nvSpPr>
         <p:spPr>
           <a:xfrm>
-            <a:off x="914400" y="2926080"/>
-            <a:ext cx="10332720" cy="914400"/>
+            <a:off x="502920" y="109728"/>
+            <a:ext cx="9144000" cy="320040"/>
           </a:xfrm>
           <a:prstGeom prst="rect">
             <a:avLst/>
@@ -3412,27 +3457,27 @@
           <a:p>
             <a:pPr algn="l"/>
             <a:r>
-              <a:rPr sz="4400" b="1">
-                <a:solidFill>
-                  <a:srgbClr val="FFFFFF"/>
-                </a:solidFill>
-                <a:latin typeface="Calibri"/>
-              </a:rPr>
-              <a:t>Appendix</a:t>
-            </a:r>
-          </a:p>
-        </p:txBody>
-      </p:sp>
-      <p:sp>
-        <p:nvSpPr>
-          <p:cNvPr id="4" name="TextBox 3"/>
+              <a:rPr sz="1300" b="1">
+                <a:solidFill>
+                  <a:srgbClr val="9FC7E8"/>
+                </a:solidFill>
+                <a:latin typeface="Calibri"/>
+              </a:rPr>
+              <a:t>BACKLOG</a:t>
+            </a:r>
+          </a:p>
+        </p:txBody>
+      </p:sp>
+      <p:sp>
+        <p:nvSpPr>
+          <p:cNvPr id="5" name="TextBox 4"/>
           <p:cNvSpPr txBox="1"/>
           <p:nvPr/>
         </p:nvSpPr>
         <p:spPr>
           <a:xfrm>
-            <a:off x="914400" y="3749039"/>
-            <a:ext cx="10332720" cy="457200"/>
+            <a:off x="457200" y="384048"/>
+            <a:ext cx="10515600" cy="594360"/>
           </a:xfrm>
           <a:prstGeom prst="rect">
             <a:avLst/>
@@ -3447,13 +3492,448 @@
           <a:p>
             <a:pPr algn="l"/>
             <a:r>
-              <a:rPr sz="1600" b="0">
-                <a:solidFill>
-                  <a:srgbClr val="CCCCCC"/>
-                </a:solidFill>
-                <a:latin typeface="Calibri"/>
-              </a:rPr>
-              <a:t>副次的な検討事項の詳細</a:t>
+              <a:rPr sz="2500" b="1">
+                <a:solidFill>
+                  <a:srgbClr val="FFFFFF"/>
+                </a:solidFill>
+                <a:latin typeface="Calibri"/>
+              </a:rPr>
+              <a:t>残課題 (3/3) — Xen コミュニティとの合意形成</a:t>
+            </a:r>
+          </a:p>
+        </p:txBody>
+      </p:sp>
+      <p:sp>
+        <p:nvSpPr>
+          <p:cNvPr id="6" name="TextBox 5"/>
+          <p:cNvSpPr txBox="1"/>
+          <p:nvPr/>
+        </p:nvSpPr>
+        <p:spPr>
+          <a:xfrm>
+            <a:off x="11247120" y="411480"/>
+            <a:ext cx="731520" cy="365760"/>
+          </a:xfrm>
+          <a:prstGeom prst="rect">
+            <a:avLst/>
+          </a:prstGeom>
+          <a:noFill/>
+        </p:spPr>
+        <p:txBody>
+          <a:bodyPr wrap="square">
+            <a:spAutoFit/>
+          </a:bodyPr>
+          <a:lstStyle/>
+          <a:p>
+            <a:pPr algn="r"/>
+            <a:r>
+              <a:rPr sz="1200" b="0">
+                <a:solidFill>
+                  <a:srgbClr val="BBCCDD"/>
+                </a:solidFill>
+                <a:latin typeface="Calibri"/>
+              </a:rPr>
+              <a:t>10/10</a:t>
+            </a:r>
+          </a:p>
+        </p:txBody>
+      </p:sp>
+      <p:sp>
+        <p:nvSpPr>
+          <p:cNvPr id="7" name="Rectangle 6"/>
+          <p:cNvSpPr/>
+          <p:nvPr/>
+        </p:nvSpPr>
+        <p:spPr>
+          <a:xfrm>
+            <a:off x="548640" y="1325880"/>
+            <a:ext cx="11064240" cy="1554480"/>
+          </a:xfrm>
+          <a:prstGeom prst="rect">
+            <a:avLst/>
+          </a:prstGeom>
+          <a:solidFill>
+            <a:srgbClr val="F4F6F9"/>
+          </a:solidFill>
+          <a:ln>
+            <a:noFill/>
+          </a:ln>
+          <a:effectLst/>
+        </p:spPr>
+        <p:style>
+          <a:lnRef idx="1">
+            <a:schemeClr val="accent1"/>
+          </a:lnRef>
+          <a:fillRef idx="3">
+            <a:schemeClr val="accent1"/>
+          </a:fillRef>
+          <a:effectRef idx="2">
+            <a:schemeClr val="accent1"/>
+          </a:effectRef>
+          <a:fontRef idx="minor">
+            <a:schemeClr val="lt1"/>
+          </a:fontRef>
+        </p:style>
+        <p:txBody>
+          <a:bodyPr rtlCol="0" anchor="ctr"/>
+          <a:lstStyle/>
+          <a:p>
+            <a:pPr algn="ctr"/>
+          </a:p>
+        </p:txBody>
+      </p:sp>
+      <p:sp>
+        <p:nvSpPr>
+          <p:cNvPr id="8" name="Rectangle 7"/>
+          <p:cNvSpPr/>
+          <p:nvPr/>
+        </p:nvSpPr>
+        <p:spPr>
+          <a:xfrm>
+            <a:off x="548640" y="1325880"/>
+            <a:ext cx="109728" cy="1554480"/>
+          </a:xfrm>
+          <a:prstGeom prst="rect">
+            <a:avLst/>
+          </a:prstGeom>
+          <a:solidFill>
+            <a:srgbClr val="2E86AB"/>
+          </a:solidFill>
+          <a:ln>
+            <a:noFill/>
+          </a:ln>
+          <a:effectLst/>
+        </p:spPr>
+        <p:style>
+          <a:lnRef idx="1">
+            <a:schemeClr val="accent1"/>
+          </a:lnRef>
+          <a:fillRef idx="3">
+            <a:schemeClr val="accent1"/>
+          </a:fillRef>
+          <a:effectRef idx="2">
+            <a:schemeClr val="accent1"/>
+          </a:effectRef>
+          <a:fontRef idx="minor">
+            <a:schemeClr val="lt1"/>
+          </a:fontRef>
+        </p:style>
+        <p:txBody>
+          <a:bodyPr rtlCol="0" anchor="ctr"/>
+          <a:lstStyle/>
+          <a:p>
+            <a:pPr algn="ctr"/>
+          </a:p>
+        </p:txBody>
+      </p:sp>
+      <p:sp>
+        <p:nvSpPr>
+          <p:cNvPr id="9" name="TextBox 8"/>
+          <p:cNvSpPr txBox="1"/>
+          <p:nvPr/>
+        </p:nvSpPr>
+        <p:spPr>
+          <a:xfrm>
+            <a:off x="822960" y="1380744"/>
+            <a:ext cx="8503920" cy="365760"/>
+          </a:xfrm>
+          <a:prstGeom prst="rect">
+            <a:avLst/>
+          </a:prstGeom>
+          <a:noFill/>
+        </p:spPr>
+        <p:txBody>
+          <a:bodyPr wrap="square">
+            <a:spAutoFit/>
+          </a:bodyPr>
+          <a:lstStyle/>
+          <a:p>
+            <a:pPr algn="l"/>
+            <a:r>
+              <a:rPr sz="1700" b="1">
+                <a:solidFill>
+                  <a:srgbClr val="1B2A4A"/>
+                </a:solidFill>
+                <a:latin typeface="Calibri"/>
+              </a:rPr>
+              <a:t>パーサー層の保守方針</a:t>
+            </a:r>
+          </a:p>
+        </p:txBody>
+      </p:sp>
+      <p:sp>
+        <p:nvSpPr>
+          <p:cNvPr id="10" name="Rectangle 9"/>
+          <p:cNvSpPr/>
+          <p:nvPr/>
+        </p:nvSpPr>
+        <p:spPr>
+          <a:xfrm>
+            <a:off x="9784080" y="1380744"/>
+            <a:ext cx="1554480" cy="347472"/>
+          </a:xfrm>
+          <a:prstGeom prst="rect">
+            <a:avLst/>
+          </a:prstGeom>
+          <a:solidFill>
+            <a:srgbClr val="2E86AB"/>
+          </a:solidFill>
+          <a:ln>
+            <a:noFill/>
+          </a:ln>
+          <a:effectLst/>
+        </p:spPr>
+        <p:style>
+          <a:lnRef idx="1">
+            <a:schemeClr val="accent1"/>
+          </a:lnRef>
+          <a:fillRef idx="3">
+            <a:schemeClr val="accent1"/>
+          </a:fillRef>
+          <a:effectRef idx="2">
+            <a:schemeClr val="accent1"/>
+          </a:effectRef>
+          <a:fontRef idx="minor">
+            <a:schemeClr val="lt1"/>
+          </a:fontRef>
+        </p:style>
+        <p:txBody>
+          <a:bodyPr rtlCol="0" anchor="ctr"/>
+          <a:lstStyle/>
+          <a:p>
+            <a:pPr algn="ctr"/>
+          </a:p>
+        </p:txBody>
+      </p:sp>
+      <p:sp>
+        <p:nvSpPr>
+          <p:cNvPr id="11" name="TextBox 10"/>
+          <p:cNvSpPr txBox="1"/>
+          <p:nvPr/>
+        </p:nvSpPr>
+        <p:spPr>
+          <a:xfrm>
+            <a:off x="9784080" y="1380744"/>
+            <a:ext cx="1554480" cy="347472"/>
+          </a:xfrm>
+          <a:prstGeom prst="rect">
+            <a:avLst/>
+          </a:prstGeom>
+          <a:noFill/>
+        </p:spPr>
+        <p:txBody>
+          <a:bodyPr wrap="square" anchor="ctr">
+            <a:spAutoFit/>
+          </a:bodyPr>
+          <a:lstStyle/>
+          <a:p>
+            <a:pPr algn="ctr"/>
+            <a:r>
+              <a:rPr sz="1200" b="1">
+                <a:solidFill>
+                  <a:srgbClr val="FFFFFF"/>
+                </a:solidFill>
+                <a:latin typeface="Calibri"/>
+              </a:rPr>
+              <a:t>要協議</a:t>
+            </a:r>
+          </a:p>
+        </p:txBody>
+      </p:sp>
+      <p:sp>
+        <p:nvSpPr>
+          <p:cNvPr id="12" name="TextBox 11"/>
+          <p:cNvSpPr txBox="1"/>
+          <p:nvPr/>
+        </p:nvSpPr>
+        <p:spPr>
+          <a:xfrm>
+            <a:off x="822960" y="1783080"/>
+            <a:ext cx="10515600" cy="365760"/>
+          </a:xfrm>
+          <a:prstGeom prst="rect">
+            <a:avLst/>
+          </a:prstGeom>
+          <a:noFill/>
+        </p:spPr>
+        <p:txBody>
+          <a:bodyPr wrap="square">
+            <a:spAutoFit/>
+          </a:bodyPr>
+          <a:lstStyle/>
+          <a:p>
+            <a:pPr algn="l">
+              <a:lnSpc>
+                <a:spcPct val="105000"/>
+              </a:lnSpc>
+            </a:pPr>
+            <a:r>
+              <a:rPr sz="1300" b="0">
+                <a:solidFill>
+                  <a:srgbClr val="1B2A4A"/>
+                </a:solidFill>
+                <a:latin typeface="Calibri"/>
+              </a:rPr>
+              <a:t>What: Xen のビルド定義(Makefile 等)が変わった際に xen_parsers.py への追従が必要になる。現状は警告ログの目視確認や SBOM の充足度チェックによる手動運用の試作段階に留まる</a:t>
+            </a:r>
+          </a:p>
+        </p:txBody>
+      </p:sp>
+      <p:sp>
+        <p:nvSpPr>
+          <p:cNvPr id="13" name="TextBox 12"/>
+          <p:cNvSpPr txBox="1"/>
+          <p:nvPr/>
+        </p:nvSpPr>
+        <p:spPr>
+          <a:xfrm>
+            <a:off x="822960" y="2167128"/>
+            <a:ext cx="10515600" cy="365760"/>
+          </a:xfrm>
+          <a:prstGeom prst="rect">
+            <a:avLst/>
+          </a:prstGeom>
+          <a:noFill/>
+        </p:spPr>
+        <p:txBody>
+          <a:bodyPr wrap="square">
+            <a:spAutoFit/>
+          </a:bodyPr>
+          <a:lstStyle/>
+          <a:p>
+            <a:pPr algn="l">
+              <a:lnSpc>
+                <a:spcPct val="105000"/>
+              </a:lnSpc>
+            </a:pPr>
+            <a:r>
+              <a:rPr sz="1250" b="0">
+                <a:solidFill>
+                  <a:srgbClr val="555555"/>
+                </a:solidFill>
+                <a:latin typeface="Calibri"/>
+              </a:rPr>
+              <a:t>Why: ビルド定義が OSS として変化していくこと自体は Linux カーネルでも同様で珍しくないが、Linux ではパーサーの保守が Linux 本流の開発体制(scripts/sbom/ が Linux ツリー内)に組み込まれているのに対し、現状の Xen 拡張は本プロジェクト側の外部レイヤーに留まる</a:t>
+            </a:r>
+          </a:p>
+        </p:txBody>
+      </p:sp>
+      <p:sp>
+        <p:nvSpPr>
+          <p:cNvPr id="14" name="Rectangle 13"/>
+          <p:cNvSpPr/>
+          <p:nvPr/>
+        </p:nvSpPr>
+        <p:spPr>
+          <a:xfrm>
+            <a:off x="548640" y="3063240"/>
+            <a:ext cx="11064240" cy="1005840"/>
+          </a:xfrm>
+          <a:prstGeom prst="rect">
+            <a:avLst/>
+          </a:prstGeom>
+          <a:solidFill>
+            <a:srgbClr val="E8F3EE"/>
+          </a:solidFill>
+          <a:ln w="15875">
+            <a:solidFill>
+              <a:srgbClr val="2E7D32"/>
+            </a:solidFill>
+          </a:ln>
+          <a:effectLst/>
+        </p:spPr>
+        <p:style>
+          <a:lnRef idx="1">
+            <a:schemeClr val="accent1"/>
+          </a:lnRef>
+          <a:fillRef idx="3">
+            <a:schemeClr val="accent1"/>
+          </a:fillRef>
+          <a:effectRef idx="2">
+            <a:schemeClr val="accent1"/>
+          </a:effectRef>
+          <a:fontRef idx="minor">
+            <a:schemeClr val="lt1"/>
+          </a:fontRef>
+        </p:style>
+        <p:txBody>
+          <a:bodyPr rtlCol="0" anchor="ctr"/>
+          <a:lstStyle/>
+          <a:p>
+            <a:pPr algn="ctr"/>
+          </a:p>
+        </p:txBody>
+      </p:sp>
+      <p:sp>
+        <p:nvSpPr>
+          <p:cNvPr id="15" name="TextBox 14"/>
+          <p:cNvSpPr txBox="1"/>
+          <p:nvPr/>
+        </p:nvSpPr>
+        <p:spPr>
+          <a:xfrm>
+            <a:off x="777240" y="3154680"/>
+            <a:ext cx="10607040" cy="822960"/>
+          </a:xfrm>
+          <a:prstGeom prst="rect">
+            <a:avLst/>
+          </a:prstGeom>
+          <a:noFill/>
+        </p:spPr>
+        <p:txBody>
+          <a:bodyPr wrap="square">
+            <a:spAutoFit/>
+          </a:bodyPr>
+          <a:lstStyle/>
+          <a:p>
+            <a:pPr algn="l">
+              <a:lnSpc>
+                <a:spcPct val="125000"/>
+              </a:lnSpc>
+            </a:pPr>
+            <a:r>
+              <a:rPr sz="1400" b="1">
+                <a:solidFill>
+                  <a:srgbClr val="2E7D32"/>
+                </a:solidFill>
+                <a:latin typeface="Calibri"/>
+              </a:rPr>
+              <a:t>この保守体制を Xen としてどう構築するか(本プロジェクトが持ち続けるか、CI 統合(前ページ)を機に Xen 本体へ寄せるか等)は未確定。Xen Summit 等でのコミュニティとの短い議論が望ましい。</a:t>
+            </a:r>
+          </a:p>
+        </p:txBody>
+      </p:sp>
+      <p:sp>
+        <p:nvSpPr>
+          <p:cNvPr id="16" name="TextBox 15"/>
+          <p:cNvSpPr txBox="1"/>
+          <p:nvPr/>
+        </p:nvSpPr>
+        <p:spPr>
+          <a:xfrm>
+            <a:off x="457200" y="6537960"/>
+            <a:ext cx="7315200" cy="274320"/>
+          </a:xfrm>
+          <a:prstGeom prst="rect">
+            <a:avLst/>
+          </a:prstGeom>
+          <a:noFill/>
+        </p:spPr>
+        <p:txBody>
+          <a:bodyPr wrap="square">
+            <a:spAutoFit/>
+          </a:bodyPr>
+          <a:lstStyle/>
+          <a:p>
+            <a:pPr algn="l"/>
+            <a:r>
+              <a:rPr sz="1000" b="0">
+                <a:solidFill>
+                  <a:srgbClr val="555555"/>
+                </a:solidFill>
+                <a:latin typeface="Calibri"/>
+              </a:rPr>
+              <a:t>Xen SPDX SBOM Project</a:t>
             </a:r>
           </a:p>
         </p:txBody>
@@ -3467,6 +3947,138 @@
 </file>
 
 <file path=ppt/slides/slide11.xml><?xml version="1.0" encoding="utf-8"?>
+<p:sld xmlns:a="http://schemas.openxmlformats.org/drawingml/2006/main" xmlns:p="http://schemas.openxmlformats.org/presentationml/2006/main" xmlns:r="http://schemas.openxmlformats.org/officeDocument/2006/relationships">
+  <p:cSld>
+    <p:spTree>
+      <p:nvGrpSpPr>
+        <p:cNvPr id="1" name=""/>
+        <p:cNvGrpSpPr/>
+        <p:nvPr/>
+      </p:nvGrpSpPr>
+      <p:grpSpPr/>
+      <p:sp>
+        <p:nvSpPr>
+          <p:cNvPr id="2" name="Rectangle 1"/>
+          <p:cNvSpPr/>
+          <p:nvPr/>
+        </p:nvSpPr>
+        <p:spPr>
+          <a:xfrm>
+            <a:off x="0" y="0"/>
+            <a:ext cx="12191695" cy="6858000"/>
+          </a:xfrm>
+          <a:prstGeom prst="rect">
+            <a:avLst/>
+          </a:prstGeom>
+          <a:solidFill>
+            <a:srgbClr val="3A3A3A"/>
+          </a:solidFill>
+          <a:ln>
+            <a:noFill/>
+          </a:ln>
+          <a:effectLst/>
+        </p:spPr>
+        <p:style>
+          <a:lnRef idx="1">
+            <a:schemeClr val="accent1"/>
+          </a:lnRef>
+          <a:fillRef idx="3">
+            <a:schemeClr val="accent1"/>
+          </a:fillRef>
+          <a:effectRef idx="2">
+            <a:schemeClr val="accent1"/>
+          </a:effectRef>
+          <a:fontRef idx="minor">
+            <a:schemeClr val="lt1"/>
+          </a:fontRef>
+        </p:style>
+        <p:txBody>
+          <a:bodyPr rtlCol="0" anchor="ctr"/>
+          <a:lstStyle/>
+          <a:p>
+            <a:pPr algn="ctr"/>
+          </a:p>
+        </p:txBody>
+      </p:sp>
+      <p:sp>
+        <p:nvSpPr>
+          <p:cNvPr id="3" name="TextBox 2"/>
+          <p:cNvSpPr txBox="1"/>
+          <p:nvPr/>
+        </p:nvSpPr>
+        <p:spPr>
+          <a:xfrm>
+            <a:off x="914400" y="2926080"/>
+            <a:ext cx="10332720" cy="914400"/>
+          </a:xfrm>
+          <a:prstGeom prst="rect">
+            <a:avLst/>
+          </a:prstGeom>
+          <a:noFill/>
+        </p:spPr>
+        <p:txBody>
+          <a:bodyPr wrap="square">
+            <a:spAutoFit/>
+          </a:bodyPr>
+          <a:lstStyle/>
+          <a:p>
+            <a:pPr algn="l"/>
+            <a:r>
+              <a:rPr sz="4400" b="1">
+                <a:solidFill>
+                  <a:srgbClr val="FFFFFF"/>
+                </a:solidFill>
+                <a:latin typeface="Calibri"/>
+              </a:rPr>
+              <a:t>Appendix</a:t>
+            </a:r>
+          </a:p>
+        </p:txBody>
+      </p:sp>
+      <p:sp>
+        <p:nvSpPr>
+          <p:cNvPr id="4" name="TextBox 3"/>
+          <p:cNvSpPr txBox="1"/>
+          <p:nvPr/>
+        </p:nvSpPr>
+        <p:spPr>
+          <a:xfrm>
+            <a:off x="914400" y="3749039"/>
+            <a:ext cx="10332720" cy="457200"/>
+          </a:xfrm>
+          <a:prstGeom prst="rect">
+            <a:avLst/>
+          </a:prstGeom>
+          <a:noFill/>
+        </p:spPr>
+        <p:txBody>
+          <a:bodyPr wrap="square">
+            <a:spAutoFit/>
+          </a:bodyPr>
+          <a:lstStyle/>
+          <a:p>
+            <a:pPr algn="l"/>
+            <a:r>
+              <a:rPr sz="1600" b="0">
+                <a:solidFill>
+                  <a:srgbClr val="CCCCCC"/>
+                </a:solidFill>
+                <a:latin typeface="Calibri"/>
+              </a:rPr>
+              <a:t>副次的な検討事項の詳細</a:t>
+            </a:r>
+          </a:p>
+        </p:txBody>
+      </p:sp>
+    </p:spTree>
+  </p:cSld>
+  <p:clrMapOvr>
+    <a:masterClrMapping/>
+  </p:clrMapOvr>
+</p:sld>
+</file>
+
+<file path=ppt/slides/slide12.xml><?xml version="1.0" encoding="utf-8"?>
 <p:sld xmlns:a="http://schemas.openxmlformats.org/drawingml/2006/main" xmlns:p="http://schemas.openxmlformats.org/presentationml/2006/main" xmlns:r="http://schemas.openxmlformats.org/officeDocument/2006/relationships">
   <p:cSld>
     <p:spTree>
@@ -4558,7 +5170,7 @@
                 </a:solidFill>
                 <a:latin typeface="Calibri"/>
               </a:rPr>
-              <a:t>2/9</a:t>
+              <a:t>2/10</a:t>
             </a:r>
           </a:p>
         </p:txBody>
@@ -5096,7 +5708,7 @@
                 </a:solidFill>
                 <a:latin typeface="Calibri"/>
               </a:rPr>
-              <a:t>3/9</a:t>
+              <a:t>3/10</a:t>
             </a:r>
           </a:p>
         </p:txBody>
@@ -5109,8 +5721,8 @@
         </p:nvSpPr>
         <p:spPr>
           <a:xfrm>
-            <a:off x="548640" y="1325880"/>
-            <a:ext cx="3383280" cy="2011680"/>
+            <a:off x="548640" y="1280160"/>
+            <a:ext cx="3383280" cy="1737360"/>
           </a:xfrm>
           <a:prstGeom prst="rect">
             <a:avLst/>
@@ -5155,7 +5767,7 @@
         </p:nvSpPr>
         <p:spPr>
           <a:xfrm>
-            <a:off x="731520" y="1444752"/>
+            <a:off x="731520" y="1371600"/>
             <a:ext cx="3017520" cy="640080"/>
           </a:xfrm>
           <a:prstGeom prst="rect">
@@ -5190,8 +5802,8 @@
         </p:nvSpPr>
         <p:spPr>
           <a:xfrm>
-            <a:off x="731520" y="2057400"/>
-            <a:ext cx="3017520" cy="1188720"/>
+            <a:off x="731520" y="1965960"/>
+            <a:ext cx="3017520" cy="1005840"/>
           </a:xfrm>
           <a:prstGeom prst="rect">
             <a:avLst/>
@@ -5206,7 +5818,7 @@
           <a:p>
             <a:pPr algn="l">
               <a:lnSpc>
-                <a:spcPct val="125000"/>
+                <a:spcPct val="120000"/>
               </a:lnSpc>
             </a:pPr>
             <a:r>
@@ -5222,7 +5834,7 @@
           <a:p>
             <a:pPr algn="l">
               <a:lnSpc>
-                <a:spcPct val="125000"/>
+                <a:spcPct val="120000"/>
               </a:lnSpc>
             </a:pPr>
             <a:r>
@@ -5238,7 +5850,7 @@
           <a:p>
             <a:pPr algn="l">
               <a:lnSpc>
-                <a:spcPct val="125000"/>
+                <a:spcPct val="120000"/>
               </a:lnSpc>
             </a:pPr>
             <a:r>
@@ -5254,7 +5866,7 @@
           <a:p>
             <a:pPr algn="l">
               <a:lnSpc>
-                <a:spcPct val="125000"/>
+                <a:spcPct val="120000"/>
               </a:lnSpc>
             </a:pPr>
             <a:r>
@@ -5277,7 +5889,7 @@
         </p:nvSpPr>
         <p:spPr>
           <a:xfrm>
-            <a:off x="3961920" y="2194560"/>
+            <a:off x="3961920" y="2011680"/>
             <a:ext cx="351480" cy="457200"/>
           </a:xfrm>
           <a:prstGeom prst="rightArrow">
@@ -5320,8 +5932,8 @@
         </p:nvSpPr>
         <p:spPr>
           <a:xfrm>
-            <a:off x="4343400" y="1325880"/>
-            <a:ext cx="3383280" cy="2011680"/>
+            <a:off x="4343400" y="1280160"/>
+            <a:ext cx="3383280" cy="1737360"/>
           </a:xfrm>
           <a:prstGeom prst="rect">
             <a:avLst/>
@@ -5366,7 +5978,7 @@
         </p:nvSpPr>
         <p:spPr>
           <a:xfrm>
-            <a:off x="4526280" y="1444752"/>
+            <a:off x="4526280" y="1371600"/>
             <a:ext cx="3017520" cy="640080"/>
           </a:xfrm>
           <a:prstGeom prst="rect">
@@ -5401,8 +6013,8 @@
         </p:nvSpPr>
         <p:spPr>
           <a:xfrm>
-            <a:off x="4526280" y="2057400"/>
-            <a:ext cx="3017520" cy="1188720"/>
+            <a:off x="4526280" y="1965960"/>
+            <a:ext cx="3017520" cy="1005840"/>
           </a:xfrm>
           <a:prstGeom prst="rect">
             <a:avLst/>
@@ -5417,7 +6029,7 @@
           <a:p>
             <a:pPr algn="l">
               <a:lnSpc>
-                <a:spcPct val="125000"/>
+                <a:spcPct val="120000"/>
               </a:lnSpc>
             </a:pPr>
             <a:r>
@@ -5433,7 +6045,7 @@
           <a:p>
             <a:pPr algn="l">
               <a:lnSpc>
-                <a:spcPct val="125000"/>
+                <a:spcPct val="120000"/>
               </a:lnSpc>
             </a:pPr>
             <a:r>
@@ -5449,7 +6061,7 @@
           <a:p>
             <a:pPr algn="l">
               <a:lnSpc>
-                <a:spcPct val="125000"/>
+                <a:spcPct val="120000"/>
               </a:lnSpc>
             </a:pPr>
             <a:r>
@@ -5465,7 +6077,7 @@
           <a:p>
             <a:pPr algn="l">
               <a:lnSpc>
-                <a:spcPct val="125000"/>
+                <a:spcPct val="120000"/>
               </a:lnSpc>
             </a:pPr>
             <a:r>
@@ -5488,7 +6100,7 @@
         </p:nvSpPr>
         <p:spPr>
           <a:xfrm>
-            <a:off x="7756680" y="2194560"/>
+            <a:off x="7756680" y="2011680"/>
             <a:ext cx="351480" cy="457200"/>
           </a:xfrm>
           <a:prstGeom prst="rightArrow">
@@ -5531,8 +6143,8 @@
         </p:nvSpPr>
         <p:spPr>
           <a:xfrm>
-            <a:off x="8138160" y="1325880"/>
-            <a:ext cx="3383280" cy="2011680"/>
+            <a:off x="8138160" y="1280160"/>
+            <a:ext cx="3383280" cy="1737360"/>
           </a:xfrm>
           <a:prstGeom prst="rect">
             <a:avLst/>
@@ -5577,7 +6189,7 @@
         </p:nvSpPr>
         <p:spPr>
           <a:xfrm>
-            <a:off x="8321040" y="1444752"/>
+            <a:off x="8321040" y="1371600"/>
             <a:ext cx="3017520" cy="640080"/>
           </a:xfrm>
           <a:prstGeom prst="rect">
@@ -5612,8 +6224,8 @@
         </p:nvSpPr>
         <p:spPr>
           <a:xfrm>
-            <a:off x="8321040" y="2057400"/>
-            <a:ext cx="3017520" cy="1188720"/>
+            <a:off x="8321040" y="1965960"/>
+            <a:ext cx="3017520" cy="1005840"/>
           </a:xfrm>
           <a:prstGeom prst="rect">
             <a:avLst/>
@@ -5628,7 +6240,7 @@
           <a:p>
             <a:pPr algn="l">
               <a:lnSpc>
-                <a:spcPct val="125000"/>
+                <a:spcPct val="120000"/>
               </a:lnSpc>
             </a:pPr>
             <a:r>
@@ -5644,7 +6256,7 @@
           <a:p>
             <a:pPr algn="l">
               <a:lnSpc>
-                <a:spcPct val="125000"/>
+                <a:spcPct val="120000"/>
               </a:lnSpc>
             </a:pPr>
             <a:r>
@@ -5660,7 +6272,7 @@
           <a:p>
             <a:pPr algn="l">
               <a:lnSpc>
-                <a:spcPct val="125000"/>
+                <a:spcPct val="120000"/>
               </a:lnSpc>
             </a:pPr>
             <a:r>
@@ -5683,8 +6295,8 @@
         </p:nvSpPr>
         <p:spPr>
           <a:xfrm>
-            <a:off x="548640" y="3520440"/>
-            <a:ext cx="11064240" cy="1371600"/>
+            <a:off x="548640" y="3108960"/>
+            <a:ext cx="11064240" cy="914400"/>
           </a:xfrm>
           <a:prstGeom prst="rect">
             <a:avLst/>
@@ -5699,129 +6311,99 @@
           <a:p>
             <a:pPr>
               <a:lnSpc>
-                <a:spcPct val="110000"/>
+                <a:spcPct val="115000"/>
               </a:lnSpc>
               <a:spcAft>
-                <a:spcPts val="700"/>
+                <a:spcPts val="800"/>
               </a:spcAft>
             </a:pPr>
             <a:r>
-              <a:rPr sz="1450" b="0">
+              <a:rPr sz="1350" b="0">
                 <a:solidFill>
                   <a:srgbClr val="1B2A4A"/>
                 </a:solidFill>
                 <a:latin typeface="Calibri"/>
               </a:rPr>
-              <a:t>■  なぜ「実行時注入」なのか: KernelSbom のソースファイルを一切変更しない代わりに、</a:t>
+              <a:t>■  なぜ「実行時注入」なのか: KernelSbom のソースファイルを一切変更せず、実行中に Python の共有モジュール(sys.modules)へパーサー定義を追加する。これにより Linux 側の将来のアップデートをそのまま取り込める</a:t>
             </a:r>
           </a:p>
           <a:p>
             <a:pPr>
               <a:lnSpc>
-                <a:spcPct val="110000"/>
+                <a:spcPct val="115000"/>
               </a:lnSpc>
               <a:spcAft>
-                <a:spcPts val="700"/>
+                <a:spcPts val="800"/>
               </a:spcAft>
             </a:pPr>
             <a:r>
-              <a:rPr sz="1300" b="0">
+              <a:rPr sz="1350" b="0">
                 <a:solidFill>
                   <a:srgbClr val="1B2A4A"/>
                 </a:solidFill>
                 <a:latin typeface="Calibri"/>
               </a:rPr>
-              <a:t>–  実行中に Python の共有モジュール(sys.modules)へパーサー定義を追加する。</a:t>
-            </a:r>
-          </a:p>
-          <a:p>
-            <a:pPr>
-              <a:lnSpc>
-                <a:spcPct val="110000"/>
-              </a:lnSpc>
-              <a:spcAft>
-                <a:spcPts val="700"/>
-              </a:spcAft>
-            </a:pPr>
-            <a:r>
-              <a:rPr sz="1300" b="0">
-                <a:solidFill>
-                  <a:srgbClr val="1B2A4A"/>
-                </a:solidFill>
-                <a:latin typeface="Calibri"/>
-              </a:rPr>
-              <a:t>–  これにより Linux 側の将来のアップデートをそのまま取り込める</a:t>
-            </a:r>
-          </a:p>
-          <a:p>
-            <a:pPr>
-              <a:lnSpc>
-                <a:spcPct val="110000"/>
-              </a:lnSpc>
-              <a:spcAft>
-                <a:spcPts val="700"/>
-              </a:spcAft>
-            </a:pPr>
-            <a:r>
-              <a:rPr sz="1450" b="0">
-                <a:solidFill>
-                  <a:srgbClr val="1B2A4A"/>
-                </a:solidFill>
-                <a:latin typeface="Calibri"/>
-              </a:rPr>
-              <a:t>■  なぜ「存在するファイルだけに絞る」処理が要るのか: Xen のビルドには「一時ファイル</a:t>
-            </a:r>
-          </a:p>
-          <a:p>
-            <a:pPr>
-              <a:lnSpc>
-                <a:spcPct val="110000"/>
-              </a:lnSpc>
-              <a:spcAft>
-                <a:spcPts val="700"/>
-              </a:spcAft>
-            </a:pPr>
-            <a:r>
-              <a:rPr sz="1300" b="0">
-                <a:solidFill>
-                  <a:srgbClr val="1B2A4A"/>
-                </a:solidFill>
-                <a:latin typeface="Calibri"/>
-              </a:rPr>
-              <a:t>–  X.new を生成し、後で X へ mv する」独特の書き方があり、素直に解釈すると</a:t>
-            </a:r>
-          </a:p>
-          <a:p>
-            <a:pPr>
-              <a:lnSpc>
-                <a:spcPct val="110000"/>
-              </a:lnSpc>
-              <a:spcAft>
-                <a:spcPts val="700"/>
-              </a:spcAft>
-            </a:pPr>
-            <a:r>
-              <a:rPr sz="1300" b="0">
-                <a:solidFill>
-                  <a:srgbClr val="1B2A4A"/>
-                </a:solidFill>
-                <a:latin typeface="Calibri"/>
-              </a:rPr>
-              <a:t>–  存在しないファイルパスを参照してしまうため、実在するファイルのみへ絞り込む</a:t>
-            </a:r>
-          </a:p>
-        </p:txBody>
-      </p:sp>
-      <p:sp>
-        <p:nvSpPr>
-          <p:cNvPr id="19" name="TextBox 18"/>
+              <a:t>■  なぜ「存在するファイルだけに絞る」処理が要るのか: Xen のビルドには「一時ファイル X.new を生成し、後で X へ mv する」独特の書き方があり、素直に解釈すると存在しないファイルパスを参照してしまうため、実在するファイルのみへ絞り込む</a:t>
+            </a:r>
+          </a:p>
+        </p:txBody>
+      </p:sp>
+      <p:sp>
+        <p:nvSpPr>
+          <p:cNvPr id="19" name="Rectangle 18"/>
+          <p:cNvSpPr/>
+          <p:nvPr/>
+        </p:nvSpPr>
+        <p:spPr>
+          <a:xfrm>
+            <a:off x="548640" y="4114800"/>
+            <a:ext cx="11064240" cy="731520"/>
+          </a:xfrm>
+          <a:prstGeom prst="rect">
+            <a:avLst/>
+          </a:prstGeom>
+          <a:solidFill>
+            <a:srgbClr val="F4F6F9"/>
+          </a:solidFill>
+          <a:ln w="15875">
+            <a:solidFill>
+              <a:srgbClr val="2E86AB"/>
+            </a:solidFill>
+          </a:ln>
+          <a:effectLst/>
+        </p:spPr>
+        <p:style>
+          <a:lnRef idx="1">
+            <a:schemeClr val="accent1"/>
+          </a:lnRef>
+          <a:fillRef idx="3">
+            <a:schemeClr val="accent1"/>
+          </a:fillRef>
+          <a:effectRef idx="2">
+            <a:schemeClr val="accent1"/>
+          </a:effectRef>
+          <a:fontRef idx="minor">
+            <a:schemeClr val="lt1"/>
+          </a:fontRef>
+        </p:style>
+        <p:txBody>
+          <a:bodyPr rtlCol="0" anchor="ctr"/>
+          <a:lstStyle/>
+          <a:p>
+            <a:pPr algn="ctr"/>
+          </a:p>
+        </p:txBody>
+      </p:sp>
+      <p:sp>
+        <p:nvSpPr>
+          <p:cNvPr id="20" name="TextBox 19"/>
           <p:cNvSpPr txBox="1"/>
           <p:nvPr/>
         </p:nvSpPr>
         <p:spPr>
           <a:xfrm>
-            <a:off x="548640" y="5440680"/>
-            <a:ext cx="11064240" cy="274320"/>
+            <a:off x="777240" y="4187952"/>
+            <a:ext cx="10607040" cy="274320"/>
           </a:xfrm>
           <a:prstGeom prst="rect">
             <a:avLst/>
@@ -5838,10 +6420,84 @@
             <a:r>
               <a:rPr sz="1250" b="1">
                 <a:solidFill>
+                  <a:srgbClr val="2E86AB"/>
+                </a:solidFill>
+                <a:latin typeface="Calibri"/>
+              </a:rPr>
+              <a:t>③の前提(Linux カーネルと共通、Xen 固有ではない)</a:t>
+            </a:r>
+          </a:p>
+        </p:txBody>
+      </p:sp>
+      <p:sp>
+        <p:nvSpPr>
+          <p:cNvPr id="21" name="TextBox 20"/>
+          <p:cNvSpPr txBox="1"/>
+          <p:nvPr/>
+        </p:nvSpPr>
+        <p:spPr>
+          <a:xfrm>
+            <a:off x="777240" y="4462272"/>
+            <a:ext cx="10607040" cy="365760"/>
+          </a:xfrm>
+          <a:prstGeom prst="rect">
+            <a:avLst/>
+          </a:prstGeom>
+          <a:noFill/>
+        </p:spPr>
+        <p:txBody>
+          <a:bodyPr wrap="square">
+            <a:spAutoFit/>
+          </a:bodyPr>
+          <a:lstStyle/>
+          <a:p>
+            <a:pPr algn="l">
+              <a:lnSpc>
+                <a:spcPct val="115000"/>
+              </a:lnSpc>
+            </a:pPr>
+            <a:r>
+              <a:rPr sz="1100" b="0">
+                <a:solidFill>
                   <a:srgbClr val="1B2A4A"/>
                 </a:solidFill>
                 <a:latin typeface="Calibri"/>
               </a:rPr>
+              <a:t>「ビルドへの組み入れ(ファイル単位)を追跡すれば十分」という前提に立つ(関数の呼び出し関係までは追わない)。これは KernelSbom 自体の設計方針であり、Xen は単一の静的リンクバイナリでアーキ固有コードの除外もソースファイル単位で行われるため、この前提がそのまま成立する。</a:t>
+            </a:r>
+          </a:p>
+        </p:txBody>
+      </p:sp>
+      <p:sp>
+        <p:nvSpPr>
+          <p:cNvPr id="22" name="TextBox 21"/>
+          <p:cNvSpPr txBox="1"/>
+          <p:nvPr/>
+        </p:nvSpPr>
+        <p:spPr>
+          <a:xfrm>
+            <a:off x="548640" y="4983480"/>
+            <a:ext cx="11064240" cy="274320"/>
+          </a:xfrm>
+          <a:prstGeom prst="rect">
+            <a:avLst/>
+          </a:prstGeom>
+          <a:noFill/>
+        </p:spPr>
+        <p:txBody>
+          <a:bodyPr wrap="square">
+            <a:spAutoFit/>
+          </a:bodyPr>
+          <a:lstStyle/>
+          <a:p>
+            <a:pPr algn="l"/>
+            <a:r>
+              <a:rPr sz="1250" b="1">
+                <a:solidFill>
+                  <a:srgbClr val="1B2A4A"/>
+                </a:solidFill>
+                <a:latin typeface="Calibri"/>
+              </a:rPr>
               <a:t>実際のコード抜粋: scripts/xen-sbom-poc/xen_parsers.py (XSM/FLASK 用パーサーの登録)</a:t>
             </a:r>
           </a:p>
@@ -5849,14 +6505,14 @@
       </p:sp>
       <p:sp>
         <p:nvSpPr>
-          <p:cNvPr id="20" name="Rectangle 19"/>
+          <p:cNvPr id="23" name="Rectangle 22"/>
           <p:cNvSpPr/>
           <p:nvPr/>
         </p:nvSpPr>
         <p:spPr>
           <a:xfrm>
-            <a:off x="548640" y="5733288"/>
-            <a:ext cx="11064240" cy="804672"/>
+            <a:off x="548640" y="5276088"/>
+            <a:ext cx="11064240" cy="1399032"/>
           </a:xfrm>
           <a:prstGeom prst="rect">
             <a:avLst/>
@@ -5893,14 +6549,14 @@
       </p:sp>
       <p:sp>
         <p:nvSpPr>
-          <p:cNvPr id="21" name="TextBox 20"/>
+          <p:cNvPr id="24" name="TextBox 23"/>
           <p:cNvSpPr txBox="1"/>
           <p:nvPr/>
         </p:nvSpPr>
         <p:spPr>
           <a:xfrm>
-            <a:off x="685800" y="5806440"/>
-            <a:ext cx="10789920" cy="658368"/>
+            <a:off x="685800" y="5349240"/>
+            <a:ext cx="10789920" cy="1252728"/>
           </a:xfrm>
           <a:prstGeom prst="rect">
             <a:avLst/>
@@ -6184,7 +6840,7 @@
                 </a:solidFill>
                 <a:latin typeface="Calibri"/>
               </a:rPr>
-              <a:t>4/9</a:t>
+              <a:t>4/10</a:t>
             </a:r>
           </a:p>
         </p:txBody>
@@ -7171,7 +7827,7 @@
                 </a:solidFill>
                 <a:latin typeface="Calibri"/>
               </a:rPr>
-              <a:t>5/9</a:t>
+              <a:t>5/10</a:t>
             </a:r>
           </a:p>
         </p:txBody>
@@ -8027,7 +8683,7 @@
                 </a:solidFill>
                 <a:latin typeface="Calibri"/>
               </a:rPr>
-              <a:t>6/9</a:t>
+              <a:t>6/10</a:t>
             </a:r>
           </a:p>
         </p:txBody>
@@ -8125,8 +8781,8 @@
         </p:nvSpPr>
         <p:spPr>
           <a:xfrm>
-            <a:off x="548640" y="2148840"/>
-            <a:ext cx="1920240" cy="1051560"/>
+            <a:off x="548640" y="2103120"/>
+            <a:ext cx="1920240" cy="1234440"/>
           </a:xfrm>
           <a:prstGeom prst="rect">
             <a:avLst/>
@@ -8169,8 +8825,8 @@
         </p:nvSpPr>
         <p:spPr>
           <a:xfrm>
-            <a:off x="548640" y="2148840"/>
-            <a:ext cx="1920240" cy="1051560"/>
+            <a:off x="548640" y="2103120"/>
+            <a:ext cx="1920240" cy="1234440"/>
           </a:xfrm>
           <a:prstGeom prst="rect">
             <a:avLst/>
@@ -8204,8 +8860,8 @@
         </p:nvSpPr>
         <p:spPr>
           <a:xfrm>
-            <a:off x="2606040" y="2148840"/>
-            <a:ext cx="9006840" cy="1051560"/>
+            <a:off x="2606040" y="2103120"/>
+            <a:ext cx="9006840" cy="1234440"/>
           </a:xfrm>
           <a:prstGeom prst="rect">
             <a:avLst/>
@@ -8220,17 +8876,17 @@
           <a:p>
             <a:pPr algn="l">
               <a:lnSpc>
-                <a:spcPct val="125000"/>
+                <a:spcPct val="120000"/>
               </a:lnSpc>
             </a:pPr>
             <a:r>
-              <a:rPr sz="1450" b="0">
+              <a:rPr sz="1400" b="0">
                 <a:solidFill>
                   <a:srgbClr val="1B2A4A"/>
                 </a:solidFill>
                 <a:latin typeface="Calibri"/>
               </a:rPr>
-              <a:t>SBOM を生成しただけでは、「あるソースファイルを変更したら、どの成果物・パッケージに影響するか」という FuSa の変更管理プロセスが必要とする問いに答える手段が無かった。</a:t>
+              <a:t>SBOM を生成しただけでは、「あるソースファイルを変更したら、どの成果物・パッケージに影響するか」という変更影響分析の問いに答える手段が無かった。将来的には脆弱性情報(VEX)との突合せ精度向上にも活用できる可能性がある(いずれも検証は未着手)。</a:t>
             </a:r>
           </a:p>
         </p:txBody>
@@ -8243,7 +8899,7 @@
         </p:nvSpPr>
         <p:spPr>
           <a:xfrm>
-            <a:off x="548640" y="3337560"/>
+            <a:off x="548640" y="3474720"/>
             <a:ext cx="1920240" cy="1051560"/>
           </a:xfrm>
           <a:prstGeom prst="rect">
@@ -8287,7 +8943,7 @@
         </p:nvSpPr>
         <p:spPr>
           <a:xfrm>
-            <a:off x="548640" y="3337560"/>
+            <a:off x="548640" y="3474720"/>
             <a:ext cx="1920240" cy="1051560"/>
           </a:xfrm>
           <a:prstGeom prst="rect">
@@ -8322,7 +8978,7 @@
         </p:nvSpPr>
         <p:spPr>
           <a:xfrm>
-            <a:off x="2606040" y="3337560"/>
+            <a:off x="2606040" y="3474720"/>
             <a:ext cx="9006840" cy="1051560"/>
           </a:xfrm>
           <a:prstGeom prst="rect">
@@ -8338,11 +8994,11 @@
           <a:p>
             <a:pPr algn="l">
               <a:lnSpc>
-                <a:spcPct val="125000"/>
+                <a:spcPct val="120000"/>
               </a:lnSpc>
             </a:pPr>
             <a:r>
-              <a:rPr sz="1450" b="0">
+              <a:rPr sz="1400" b="0">
                 <a:solidFill>
                   <a:srgbClr val="1B2A4A"/>
                 </a:solidFill>
@@ -8361,7 +9017,7 @@
         </p:nvSpPr>
         <p:spPr>
           <a:xfrm>
-            <a:off x="548640" y="4526280"/>
+            <a:off x="548640" y="4663440"/>
             <a:ext cx="1920240" cy="1051560"/>
           </a:xfrm>
           <a:prstGeom prst="rect">
@@ -8405,7 +9061,7 @@
         </p:nvSpPr>
         <p:spPr>
           <a:xfrm>
-            <a:off x="548640" y="4526280"/>
+            <a:off x="548640" y="4663440"/>
             <a:ext cx="1920240" cy="1051560"/>
           </a:xfrm>
           <a:prstGeom prst="rect">
@@ -8440,7 +9096,7 @@
         </p:nvSpPr>
         <p:spPr>
           <a:xfrm>
-            <a:off x="2606040" y="4526280"/>
+            <a:off x="2606040" y="4663440"/>
             <a:ext cx="9006840" cy="1051560"/>
           </a:xfrm>
           <a:prstGeom prst="rect">
@@ -8456,11 +9112,11 @@
           <a:p>
             <a:pPr algn="l">
               <a:lnSpc>
-                <a:spcPct val="125000"/>
+                <a:spcPct val="120000"/>
               </a:lnSpc>
             </a:pPr>
             <a:r>
-              <a:rPr sz="1450" b="0">
+              <a:rPr sz="1400" b="0">
                 <a:solidFill>
                   <a:srgbClr val="1B2A4A"/>
                 </a:solidFill>
@@ -8747,7 +9403,7 @@
                 </a:solidFill>
                 <a:latin typeface="Calibri"/>
               </a:rPr>
-              <a:t>7/9</a:t>
+              <a:t>7/10</a:t>
             </a:r>
           </a:p>
         </p:txBody>
@@ -9564,7 +10220,7 @@
                 </a:solidFill>
                 <a:latin typeface="Calibri"/>
               </a:rPr>
-              <a:t>8/9</a:t>
+              <a:t>8/10</a:t>
             </a:r>
           </a:p>
         </p:txBody>
@@ -10930,7 +11586,7 @@
                 </a:solidFill>
                 <a:latin typeface="Calibri"/>
               </a:rPr>
-              <a:t>9/9</a:t>
+              <a:t>9/10</a:t>
             </a:r>
           </a:p>
         </p:txBody>
